--- a/examples/EVM1110E_W11/EVM1110E_W11_Media_Influencers.pptx
+++ b/examples/EVM1110E_W11/EVM1110E_W11_Media_Influencers.pptx
@@ -530,7 +530,7 @@
           <a:p>
             <a:r>
               <a:rPr lang="en-US" dirty="0"/>
-              <a:t>Slide 1 (dàn ý #1). Phần 3, buổi 3/4. Điền tên giảng viên trước khi dạy.
+              <a:t>Slide 1 (dàn ý #1). Phần 3, buổi 3/4.
 Alt-text: các vòng tròn đồng tâm lan tỏa từ Key Account ở giữa — hình ảnh giá trị được báo chí và KOL khuếch đại.</a:t>
             </a:r>
             <a:endParaRPr lang="en-US" dirty="0"/>
@@ -3878,7 +3878,7 @@
                 <a:ea typeface="Alexandria" pitchFamily="34" charset="-122"/>
                 <a:cs typeface="Alexandria" pitchFamily="34" charset="-120"/>
               </a:rPr>
-              <a:t>Giảng viên: [Tên giảng viên]</a:t>
+              <a:t>Giảng viên: Đoàn Nguyễn Bảo Quyên</a:t>
             </a:r>
             <a:endParaRPr lang="en-US" sz="1500" dirty="0"/>
           </a:p>
